--- a/session2/exam-strategy/q3/q3_exam_strategy.pptx
+++ b/session2/exam-strategy/q3/q3_exam_strategy.pptx
@@ -3187,8 +3187,8 @@
         </p:nvSpPr>
         <p:spPr>
           <a:xfrm>
-            <a:off x="274320" y="685800"/>
-            <a:ext cx="6400800" cy="1645920"/>
+            <a:off x="274320" y="640080"/>
+            <a:ext cx="6583680" cy="1280160"/>
           </a:xfrm>
           <a:prstGeom prst="rect">
             <a:avLst/>
@@ -3196,13 +3196,13 @@
           <a:noFill/>
         </p:spPr>
         <p:txBody>
-          <a:bodyPr wrap="square">
+          <a:bodyPr wrap="square" tIns="0" bIns="0">
             <a:spAutoFit/>
           </a:bodyPr>
           <a:lstStyle/>
           <a:p>
             <a:pPr>
-              <a:defRPr sz="1100">
+              <a:defRPr sz="900">
                 <a:solidFill>
                   <a:srgbClr val="FFFFFF"/>
                 </a:solidFill>
@@ -3223,8 +3223,8 @@
         </p:nvSpPr>
         <p:spPr>
           <a:xfrm>
-            <a:off x="365760" y="2377440"/>
-            <a:ext cx="274320" cy="274320"/>
+            <a:off x="274320" y="2057400"/>
+            <a:ext cx="201168" cy="201168"/>
           </a:xfrm>
           <a:prstGeom prst="ellipse">
             <a:avLst/>
@@ -3255,7 +3255,7 @@
           <a:lstStyle/>
           <a:p>
             <a:pPr algn="ctr">
-              <a:defRPr sz="900" b="1">
+              <a:defRPr sz="700" b="1">
                 <a:solidFill>
                   <a:srgbClr val="FFFFFF"/>
                 </a:solidFill>
@@ -3275,8 +3275,8 @@
         </p:nvSpPr>
         <p:spPr>
           <a:xfrm>
-            <a:off x="777240" y="2377440"/>
-            <a:ext cx="5943600" cy="411480"/>
+            <a:off x="548640" y="2011680"/>
+            <a:ext cx="6400800" cy="736092"/>
           </a:xfrm>
           <a:prstGeom prst="rect">
             <a:avLst/>
@@ -3284,13 +3284,13 @@
           <a:noFill/>
         </p:spPr>
         <p:txBody>
-          <a:bodyPr wrap="square">
+          <a:bodyPr wrap="square" tIns="25400" bIns="0" lIns="0">
             <a:spAutoFit/>
           </a:bodyPr>
           <a:lstStyle/>
           <a:p>
             <a:pPr>
-              <a:defRPr sz="1000">
+              <a:defRPr sz="800">
                 <a:solidFill>
                   <a:srgbClr val="CCCCCC"/>
                 </a:solidFill>
@@ -3298,7 +3298,7 @@
               </a:defRPr>
             </a:pPr>
             <a:r>
-              <a:t>Hard-coding parameters within any code is not a good practice. Lambda function artifacts are not stored with encryption </a:t>
+              <a:t>Hard-coding parameters within any code is not a good practice. Lambda function artifacts are not sto</a:t>
             </a:r>
           </a:p>
         </p:txBody>
@@ -3311,8 +3311,8 @@
         </p:nvSpPr>
         <p:spPr>
           <a:xfrm>
-            <a:off x="365760" y="2834640"/>
-            <a:ext cx="274320" cy="274320"/>
+            <a:off x="274320" y="2811780"/>
+            <a:ext cx="201168" cy="201168"/>
           </a:xfrm>
           <a:prstGeom prst="ellipse">
             <a:avLst/>
@@ -3343,7 +3343,7 @@
           <a:lstStyle/>
           <a:p>
             <a:pPr algn="ctr">
-              <a:defRPr sz="900" b="1">
+              <a:defRPr sz="700" b="1">
                 <a:solidFill>
                   <a:srgbClr val="FFFFFF"/>
                 </a:solidFill>
@@ -3363,8 +3363,8 @@
         </p:nvSpPr>
         <p:spPr>
           <a:xfrm>
-            <a:off x="777240" y="2834640"/>
-            <a:ext cx="5943600" cy="411480"/>
+            <a:off x="548640" y="2766060"/>
+            <a:ext cx="6400800" cy="736092"/>
           </a:xfrm>
           <a:prstGeom prst="rect">
             <a:avLst/>
@@ -3372,13 +3372,13 @@
           <a:noFill/>
         </p:spPr>
         <p:txBody>
-          <a:bodyPr wrap="square">
+          <a:bodyPr wrap="square" tIns="25400" bIns="0" lIns="0">
             <a:spAutoFit/>
           </a:bodyPr>
           <a:lstStyle/>
           <a:p>
             <a:pPr>
-              <a:defRPr sz="1000">
+              <a:defRPr sz="800">
                 <a:solidFill>
                   <a:srgbClr val="CCCCCC"/>
                 </a:solidFill>
@@ -3399,8 +3399,8 @@
         </p:nvSpPr>
         <p:spPr>
           <a:xfrm>
-            <a:off x="365760" y="3291840"/>
-            <a:ext cx="274320" cy="274320"/>
+            <a:off x="274320" y="3566160"/>
+            <a:ext cx="201168" cy="201168"/>
           </a:xfrm>
           <a:prstGeom prst="ellipse">
             <a:avLst/>
@@ -3431,7 +3431,7 @@
           <a:lstStyle/>
           <a:p>
             <a:pPr algn="ctr">
-              <a:defRPr sz="900" b="1">
+              <a:defRPr sz="700" b="1">
                 <a:solidFill>
                   <a:srgbClr val="FFFFFF"/>
                 </a:solidFill>
@@ -3451,8 +3451,8 @@
         </p:nvSpPr>
         <p:spPr>
           <a:xfrm>
-            <a:off x="777240" y="3291840"/>
-            <a:ext cx="5943600" cy="411480"/>
+            <a:off x="548640" y="3520440"/>
+            <a:ext cx="6400800" cy="736092"/>
           </a:xfrm>
           <a:prstGeom prst="rect">
             <a:avLst/>
@@ -3460,13 +3460,13 @@
           <a:noFill/>
         </p:spPr>
         <p:txBody>
-          <a:bodyPr wrap="square">
+          <a:bodyPr wrap="square" tIns="25400" bIns="0" lIns="0">
             <a:spAutoFit/>
           </a:bodyPr>
           <a:lstStyle/>
           <a:p>
             <a:pPr>
-              <a:defRPr sz="1000">
+              <a:defRPr sz="800">
                 <a:solidFill>
                   <a:srgbClr val="CCCCCC"/>
                 </a:solidFill>
@@ -3474,7 +3474,7 @@
               </a:defRPr>
             </a:pPr>
             <a:r>
-              <a:t>While this solution provides a minor improvement over hard-coding parameters, co-packaging parameter values in a deploym</a:t>
+              <a:t>While this solution provides a minor improvement over hard-coding parameters, co-packaging parameter</a:t>
             </a:r>
           </a:p>
         </p:txBody>
@@ -3487,8 +3487,8 @@
         </p:nvSpPr>
         <p:spPr>
           <a:xfrm>
-            <a:off x="365760" y="3749039"/>
-            <a:ext cx="274320" cy="274320"/>
+            <a:off x="274320" y="4320540"/>
+            <a:ext cx="201168" cy="201168"/>
           </a:xfrm>
           <a:prstGeom prst="ellipse">
             <a:avLst/>
@@ -3519,7 +3519,7 @@
           <a:lstStyle/>
           <a:p>
             <a:pPr algn="ctr">
-              <a:defRPr sz="900" b="1">
+              <a:defRPr sz="700" b="1">
                 <a:solidFill>
                   <a:srgbClr val="FFFFFF"/>
                 </a:solidFill>
@@ -3539,8 +3539,8 @@
         </p:nvSpPr>
         <p:spPr>
           <a:xfrm>
-            <a:off x="777240" y="3749039"/>
-            <a:ext cx="5943600" cy="411480"/>
+            <a:off x="548640" y="4274820"/>
+            <a:ext cx="6400800" cy="736092"/>
           </a:xfrm>
           <a:prstGeom prst="rect">
             <a:avLst/>
@@ -3548,13 +3548,13 @@
           <a:noFill/>
         </p:spPr>
         <p:txBody>
-          <a:bodyPr wrap="square">
+          <a:bodyPr wrap="square" tIns="25400" bIns="0" lIns="0">
             <a:spAutoFit/>
           </a:bodyPr>
           <a:lstStyle/>
           <a:p>
             <a:pPr>
-              <a:defRPr sz="1000">
+              <a:defRPr sz="800">
                 <a:solidFill>
                   <a:srgbClr val="CCCCCC"/>
                 </a:solidFill>
@@ -3562,7 +3562,7 @@
               </a:defRPr>
             </a:pPr>
             <a:r>
-              <a:t>Parameter Store allows for easy externalization of parameters, such as an API key. The secure string option provides for</a:t>
+              <a:t>Parameter Store allows for easy externalization of parameters, such as an API key. The secure string</a:t>
             </a:r>
           </a:p>
         </p:txBody>
@@ -3844,8 +3844,8 @@
         </p:blipFill>
         <p:spPr>
           <a:xfrm>
-            <a:off x="182880" y="914400"/>
-            <a:ext cx="3228638" cy="3840480"/>
+            <a:off x="182880" y="1140089"/>
+            <a:ext cx="5303520" cy="3389100"/>
           </a:xfrm>
           <a:prstGeom prst="rect">
             <a:avLst/>
@@ -3980,9 +3980,9 @@
           <a:p>
             <a:pPr>
               <a:spcAft>
-                <a:spcPts val="600"/>
+                <a:spcPts val="400"/>
               </a:spcAft>
-              <a:defRPr sz="900">
+              <a:defRPr sz="800">
                 <a:solidFill>
                   <a:srgbClr val="212121"/>
                 </a:solidFill>
@@ -3990,15 +3990,15 @@
               </a:defRPr>
             </a:pPr>
             <a:r>
-              <a:t>• Hard-coding parameters within any code is not a good practice.</a:t>
+              <a:t>• Hard-coding parameters within any code is not a good practice</a:t>
             </a:r>
           </a:p>
           <a:p>
             <a:pPr>
               <a:spcAft>
-                <a:spcPts val="600"/>
+                <a:spcPts val="400"/>
               </a:spcAft>
-              <a:defRPr sz="900">
+              <a:defRPr sz="800">
                 <a:solidFill>
                   <a:srgbClr val="212121"/>
                 </a:solidFill>
@@ -4006,15 +4006,15 @@
               </a:defRPr>
             </a:pPr>
             <a:r>
-              <a:t>• Lambda function artifacts are not stored with encryption at rest.</a:t>
+              <a:t>• Lambda function artifacts are not stored with encryption at rest</a:t>
             </a:r>
           </a:p>
           <a:p>
             <a:pPr>
               <a:spcAft>
-                <a:spcPts val="600"/>
+                <a:spcPts val="400"/>
               </a:spcAft>
-              <a:defRPr sz="900">
+              <a:defRPr sz="800">
                 <a:solidFill>
                   <a:srgbClr val="212121"/>
                 </a:solidFill>
@@ -4022,15 +4022,15 @@
               </a:defRPr>
             </a:pPr>
             <a:r>
-              <a:t>• While the Java code is compiled and not visible from the Lambda console, the source code is not compiled and still carries the values without encryption.</a:t>
+              <a:t>• While the Java code is compiled and not visible from the Lambda console</a:t>
             </a:r>
           </a:p>
           <a:p>
             <a:pPr>
               <a:spcAft>
-                <a:spcPts val="600"/>
+                <a:spcPts val="400"/>
               </a:spcAft>
-              <a:defRPr sz="900">
+              <a:defRPr sz="800">
                 <a:solidFill>
                   <a:srgbClr val="212121"/>
                 </a:solidFill>
@@ -4038,7 +4038,39 @@
               </a:defRPr>
             </a:pPr>
             <a:r>
-              <a:t>• Any changes to parameter values would require code modification, rebuilding, and re-deployment, which would not be operationally efficient.</a:t>
+              <a:t>• The source code is not compiled and still carries the values without encryption</a:t>
+            </a:r>
+          </a:p>
+          <a:p>
+            <a:pPr>
+              <a:spcAft>
+                <a:spcPts val="400"/>
+              </a:spcAft>
+              <a:defRPr sz="800">
+                <a:solidFill>
+                  <a:srgbClr val="212121"/>
+                </a:solidFill>
+                <a:latin typeface="Segoe UI"/>
+              </a:defRPr>
+            </a:pPr>
+            <a:r>
+              <a:t>• Any changes to parameter values would require code modification, rebuilding, and re-deployment</a:t>
+            </a:r>
+          </a:p>
+          <a:p>
+            <a:pPr>
+              <a:spcAft>
+                <a:spcPts val="400"/>
+              </a:spcAft>
+              <a:defRPr sz="800">
+                <a:solidFill>
+                  <a:srgbClr val="212121"/>
+                </a:solidFill>
+                <a:latin typeface="Segoe UI"/>
+              </a:defRPr>
+            </a:pPr>
+            <a:r>
+              <a:t>• Would not be operationally efficient</a:t>
             </a:r>
           </a:p>
         </p:txBody>
@@ -4217,8 +4249,8 @@
         </p:blipFill>
         <p:spPr>
           <a:xfrm>
-            <a:off x="182880" y="1466854"/>
-            <a:ext cx="5303520" cy="2735570"/>
+            <a:off x="182880" y="1303771"/>
+            <a:ext cx="5303520" cy="3061736"/>
           </a:xfrm>
           <a:prstGeom prst="rect">
             <a:avLst/>
@@ -4353,9 +4385,9 @@
           <a:p>
             <a:pPr>
               <a:spcAft>
-                <a:spcPts val="600"/>
+                <a:spcPts val="400"/>
               </a:spcAft>
-              <a:defRPr sz="900">
+              <a:defRPr sz="800">
                 <a:solidFill>
                   <a:srgbClr val="212121"/>
                 </a:solidFill>
@@ -4363,7 +4395,7 @@
               </a:defRPr>
             </a:pPr>
             <a:r>
-              <a:t>• Amazon EBS volumes can be mounted by Amazon EC2 instances, but not by Lambda functions.</a:t>
+              <a:t>• Amazon EBS volumes can be mounted by Amazon EC2 instances, but not by Lambda functions</a:t>
             </a:r>
           </a:p>
         </p:txBody>
@@ -4542,8 +4574,8 @@
         </p:blipFill>
         <p:spPr>
           <a:xfrm>
-            <a:off x="182880" y="914400"/>
-            <a:ext cx="3228638" cy="3840480"/>
+            <a:off x="182880" y="1204267"/>
+            <a:ext cx="5303520" cy="3260745"/>
           </a:xfrm>
           <a:prstGeom prst="rect">
             <a:avLst/>
@@ -4678,9 +4710,9 @@
           <a:p>
             <a:pPr>
               <a:spcAft>
-                <a:spcPts val="600"/>
+                <a:spcPts val="400"/>
               </a:spcAft>
-              <a:defRPr sz="900">
+              <a:defRPr sz="800">
                 <a:solidFill>
                   <a:srgbClr val="212121"/>
                 </a:solidFill>
@@ -4688,15 +4720,15 @@
               </a:defRPr>
             </a:pPr>
             <a:r>
-              <a:t>• While this solution provides a minor improvement over hard-coding parameters, co-packaging parameter values in a deployment artifact is not a Lambda function best practice.</a:t>
+              <a:t>• While this solution provides a minor improvement over hard-coding parameters</a:t>
             </a:r>
           </a:p>
           <a:p>
             <a:pPr>
               <a:spcAft>
-                <a:spcPts val="600"/>
+                <a:spcPts val="400"/>
               </a:spcAft>
-              <a:defRPr sz="900">
+              <a:defRPr sz="800">
                 <a:solidFill>
                   <a:srgbClr val="212121"/>
                 </a:solidFill>
@@ -4704,15 +4736,15 @@
               </a:defRPr>
             </a:pPr>
             <a:r>
-              <a:t>• Lambda function artifacts are not stored with encryption at rest.</a:t>
+              <a:t>• Co-packaging parameter values in a deployment artifact is not a Lambda function best practice</a:t>
             </a:r>
           </a:p>
           <a:p>
             <a:pPr>
               <a:spcAft>
-                <a:spcPts val="600"/>
+                <a:spcPts val="400"/>
               </a:spcAft>
-              <a:defRPr sz="900">
+              <a:defRPr sz="800">
                 <a:solidFill>
                   <a:srgbClr val="212121"/>
                 </a:solidFill>
@@ -4720,15 +4752,15 @@
               </a:defRPr>
             </a:pPr>
             <a:r>
-              <a:t>• While the Java artifact, including the property file, is compiled and not visible in the Lambda console, the source code is not compiled and still carries the values without encryption.</a:t>
+              <a:t>• Lambda function artifacts are not stored with encryption at rest</a:t>
             </a:r>
           </a:p>
           <a:p>
             <a:pPr>
               <a:spcAft>
-                <a:spcPts val="600"/>
+                <a:spcPts val="400"/>
               </a:spcAft>
-              <a:defRPr sz="900">
+              <a:defRPr sz="800">
                 <a:solidFill>
                   <a:srgbClr val="212121"/>
                 </a:solidFill>
@@ -4736,7 +4768,71 @@
               </a:defRPr>
             </a:pPr>
             <a:r>
-              <a:t>• Any changes to parameter values would require property file modification, rebuilding, and re-deployment, which is not operationally efficient.</a:t>
+              <a:t>• While the Java artifact</a:t>
+            </a:r>
+          </a:p>
+          <a:p>
+            <a:pPr>
+              <a:spcAft>
+                <a:spcPts val="400"/>
+              </a:spcAft>
+              <a:defRPr sz="800">
+                <a:solidFill>
+                  <a:srgbClr val="212121"/>
+                </a:solidFill>
+                <a:latin typeface="Segoe UI"/>
+              </a:defRPr>
+            </a:pPr>
+            <a:r>
+              <a:t>• Including the property file</a:t>
+            </a:r>
+          </a:p>
+          <a:p>
+            <a:pPr>
+              <a:spcAft>
+                <a:spcPts val="400"/>
+              </a:spcAft>
+              <a:defRPr sz="800">
+                <a:solidFill>
+                  <a:srgbClr val="212121"/>
+                </a:solidFill>
+                <a:latin typeface="Segoe UI"/>
+              </a:defRPr>
+            </a:pPr>
+            <a:r>
+              <a:t>• Is compiled and not visible in the Lambda console, the source code is not compiled and still carries the values without encryption</a:t>
+            </a:r>
+          </a:p>
+          <a:p>
+            <a:pPr>
+              <a:spcAft>
+                <a:spcPts val="400"/>
+              </a:spcAft>
+              <a:defRPr sz="800">
+                <a:solidFill>
+                  <a:srgbClr val="212121"/>
+                </a:solidFill>
+                <a:latin typeface="Segoe UI"/>
+              </a:defRPr>
+            </a:pPr>
+            <a:r>
+              <a:t>• Any changes to parameter values would require property file modification, rebuilding, and re-deployment</a:t>
+            </a:r>
+          </a:p>
+          <a:p>
+            <a:pPr>
+              <a:spcAft>
+                <a:spcPts val="400"/>
+              </a:spcAft>
+              <a:defRPr sz="800">
+                <a:solidFill>
+                  <a:srgbClr val="212121"/>
+                </a:solidFill>
+                <a:latin typeface="Segoe UI"/>
+              </a:defRPr>
+            </a:pPr>
+            <a:r>
+              <a:t>• Is not operationally efficient</a:t>
             </a:r>
           </a:p>
         </p:txBody>
@@ -4916,7 +5012,7 @@
         <p:spPr>
           <a:xfrm>
             <a:off x="182880" y="914400"/>
-            <a:ext cx="5280660" cy="3840480"/>
+            <a:ext cx="3698240" cy="3840480"/>
           </a:xfrm>
           <a:prstGeom prst="rect">
             <a:avLst/>
@@ -5051,9 +5147,9 @@
           <a:p>
             <a:pPr>
               <a:spcAft>
-                <a:spcPts val="600"/>
+                <a:spcPts val="400"/>
               </a:spcAft>
-              <a:defRPr sz="900">
+              <a:defRPr sz="800">
                 <a:solidFill>
                   <a:srgbClr val="212121"/>
                 </a:solidFill>
@@ -5061,15 +5157,15 @@
               </a:defRPr>
             </a:pPr>
             <a:r>
-              <a:t>• Parameter Store allows for easy externalization of parameters, such as an API key.</a:t>
+              <a:t>• Parameter Store allows for easy externalization of parameters, such as an API key</a:t>
             </a:r>
           </a:p>
           <a:p>
             <a:pPr>
               <a:spcAft>
-                <a:spcPts val="600"/>
+                <a:spcPts val="400"/>
               </a:spcAft>
-              <a:defRPr sz="900">
+              <a:defRPr sz="800">
                 <a:solidFill>
                   <a:srgbClr val="212121"/>
                 </a:solidFill>
@@ -5077,15 +5173,15 @@
               </a:defRPr>
             </a:pPr>
             <a:r>
-              <a:t>• The secure string option provides for data security by keeping the value encrypted at rest.</a:t>
+              <a:t>• The secure string option provides for data security by keeping the value encrypted at rest</a:t>
             </a:r>
           </a:p>
           <a:p>
             <a:pPr>
               <a:spcAft>
-                <a:spcPts val="600"/>
+                <a:spcPts val="400"/>
               </a:spcAft>
-              <a:defRPr sz="900">
+              <a:defRPr sz="800">
                 <a:solidFill>
                   <a:srgbClr val="212121"/>
                 </a:solidFill>
@@ -5093,15 +5189,15 @@
               </a:defRPr>
             </a:pPr>
             <a:r>
-              <a:t>• Authorized access to the parameter is governed by IAM permissions.</a:t>
+              <a:t>• Authorized access to the parameter is governed by IAM permissions</a:t>
             </a:r>
           </a:p>
           <a:p>
             <a:pPr>
               <a:spcAft>
-                <a:spcPts val="600"/>
+                <a:spcPts val="400"/>
               </a:spcAft>
-              <a:defRPr sz="900">
+              <a:defRPr sz="800">
                 <a:solidFill>
                   <a:srgbClr val="212121"/>
                 </a:solidFill>
@@ -5109,7 +5205,23 @@
               </a:defRPr>
             </a:pPr>
             <a:r>
-              <a:t>• Parameter values can be easily changed by authorized principals at any time without requiring a re-deployment of the function, although the function would require intelligence to re-read the parameter values.</a:t>
+              <a:t>• Parameter values can be easily changed by authorized principals at any time without requiring a re-deployment of the function</a:t>
+            </a:r>
+          </a:p>
+          <a:p>
+            <a:pPr>
+              <a:spcAft>
+                <a:spcPts val="400"/>
+              </a:spcAft>
+              <a:defRPr sz="800">
+                <a:solidFill>
+                  <a:srgbClr val="212121"/>
+                </a:solidFill>
+                <a:latin typeface="Segoe UI"/>
+              </a:defRPr>
+            </a:pPr>
+            <a:r>
+              <a:t>• Although the function would require intelligence to re-read the parameter values</a:t>
             </a:r>
           </a:p>
         </p:txBody>

--- a/session2/exam-strategy/q3/q3_exam_strategy.pptx
+++ b/session2/exam-strategy/q3/q3_exam_strategy.pptx
@@ -3187,8 +3187,8 @@
         </p:nvSpPr>
         <p:spPr>
           <a:xfrm>
-            <a:off x="274320" y="640080"/>
-            <a:ext cx="6583680" cy="1280160"/>
+            <a:off x="274320" y="685800"/>
+            <a:ext cx="6400800" cy="1645920"/>
           </a:xfrm>
           <a:prstGeom prst="rect">
             <a:avLst/>
@@ -3196,13 +3196,13 @@
           <a:noFill/>
         </p:spPr>
         <p:txBody>
-          <a:bodyPr wrap="square" tIns="0" bIns="0">
+          <a:bodyPr wrap="square">
             <a:spAutoFit/>
           </a:bodyPr>
           <a:lstStyle/>
           <a:p>
             <a:pPr>
-              <a:defRPr sz="900">
+              <a:defRPr sz="1100">
                 <a:solidFill>
                   <a:srgbClr val="FFFFFF"/>
                 </a:solidFill>
@@ -3223,8 +3223,8 @@
         </p:nvSpPr>
         <p:spPr>
           <a:xfrm>
-            <a:off x="274320" y="2057400"/>
-            <a:ext cx="201168" cy="201168"/>
+            <a:off x="365760" y="2377440"/>
+            <a:ext cx="274320" cy="274320"/>
           </a:xfrm>
           <a:prstGeom prst="ellipse">
             <a:avLst/>
@@ -3255,7 +3255,7 @@
           <a:lstStyle/>
           <a:p>
             <a:pPr algn="ctr">
-              <a:defRPr sz="700" b="1">
+              <a:defRPr sz="900" b="1">
                 <a:solidFill>
                   <a:srgbClr val="FFFFFF"/>
                 </a:solidFill>
@@ -3275,8 +3275,8 @@
         </p:nvSpPr>
         <p:spPr>
           <a:xfrm>
-            <a:off x="548640" y="2011680"/>
-            <a:ext cx="6400800" cy="736092"/>
+            <a:off x="777240" y="2377440"/>
+            <a:ext cx="5943600" cy="411480"/>
           </a:xfrm>
           <a:prstGeom prst="rect">
             <a:avLst/>
@@ -3284,13 +3284,13 @@
           <a:noFill/>
         </p:spPr>
         <p:txBody>
-          <a:bodyPr wrap="square" tIns="25400" bIns="0" lIns="0">
+          <a:bodyPr wrap="square">
             <a:spAutoFit/>
           </a:bodyPr>
           <a:lstStyle/>
           <a:p>
             <a:pPr>
-              <a:defRPr sz="800">
+              <a:defRPr sz="1000">
                 <a:solidFill>
                   <a:srgbClr val="CCCCCC"/>
                 </a:solidFill>
@@ -3298,7 +3298,7 @@
               </a:defRPr>
             </a:pPr>
             <a:r>
-              <a:t>Hard-coding parameters within any code is not a good practice. Lambda function artifacts are not sto</a:t>
+              <a:t>Hard-coding parameters within any code is not a good practice. Lambda function artifacts are not stored with encryption </a:t>
             </a:r>
           </a:p>
         </p:txBody>
@@ -3311,8 +3311,8 @@
         </p:nvSpPr>
         <p:spPr>
           <a:xfrm>
-            <a:off x="274320" y="2811780"/>
-            <a:ext cx="201168" cy="201168"/>
+            <a:off x="365760" y="2834640"/>
+            <a:ext cx="274320" cy="274320"/>
           </a:xfrm>
           <a:prstGeom prst="ellipse">
             <a:avLst/>
@@ -3343,7 +3343,7 @@
           <a:lstStyle/>
           <a:p>
             <a:pPr algn="ctr">
-              <a:defRPr sz="700" b="1">
+              <a:defRPr sz="900" b="1">
                 <a:solidFill>
                   <a:srgbClr val="FFFFFF"/>
                 </a:solidFill>
@@ -3363,8 +3363,8 @@
         </p:nvSpPr>
         <p:spPr>
           <a:xfrm>
-            <a:off x="548640" y="2766060"/>
-            <a:ext cx="6400800" cy="736092"/>
+            <a:off x="777240" y="2834640"/>
+            <a:ext cx="5943600" cy="411480"/>
           </a:xfrm>
           <a:prstGeom prst="rect">
             <a:avLst/>
@@ -3372,13 +3372,13 @@
           <a:noFill/>
         </p:spPr>
         <p:txBody>
-          <a:bodyPr wrap="square" tIns="25400" bIns="0" lIns="0">
+          <a:bodyPr wrap="square">
             <a:spAutoFit/>
           </a:bodyPr>
           <a:lstStyle/>
           <a:p>
             <a:pPr>
-              <a:defRPr sz="800">
+              <a:defRPr sz="1000">
                 <a:solidFill>
                   <a:srgbClr val="CCCCCC"/>
                 </a:solidFill>
@@ -3399,8 +3399,8 @@
         </p:nvSpPr>
         <p:spPr>
           <a:xfrm>
-            <a:off x="274320" y="3566160"/>
-            <a:ext cx="201168" cy="201168"/>
+            <a:off x="365760" y="3291840"/>
+            <a:ext cx="274320" cy="274320"/>
           </a:xfrm>
           <a:prstGeom prst="ellipse">
             <a:avLst/>
@@ -3431,7 +3431,7 @@
           <a:lstStyle/>
           <a:p>
             <a:pPr algn="ctr">
-              <a:defRPr sz="700" b="1">
+              <a:defRPr sz="900" b="1">
                 <a:solidFill>
                   <a:srgbClr val="FFFFFF"/>
                 </a:solidFill>
@@ -3451,8 +3451,8 @@
         </p:nvSpPr>
         <p:spPr>
           <a:xfrm>
-            <a:off x="548640" y="3520440"/>
-            <a:ext cx="6400800" cy="736092"/>
+            <a:off x="777240" y="3291840"/>
+            <a:ext cx="5943600" cy="411480"/>
           </a:xfrm>
           <a:prstGeom prst="rect">
             <a:avLst/>
@@ -3460,13 +3460,13 @@
           <a:noFill/>
         </p:spPr>
         <p:txBody>
-          <a:bodyPr wrap="square" tIns="25400" bIns="0" lIns="0">
+          <a:bodyPr wrap="square">
             <a:spAutoFit/>
           </a:bodyPr>
           <a:lstStyle/>
           <a:p>
             <a:pPr>
-              <a:defRPr sz="800">
+              <a:defRPr sz="1000">
                 <a:solidFill>
                   <a:srgbClr val="CCCCCC"/>
                 </a:solidFill>
@@ -3474,7 +3474,7 @@
               </a:defRPr>
             </a:pPr>
             <a:r>
-              <a:t>While this solution provides a minor improvement over hard-coding parameters, co-packaging parameter</a:t>
+              <a:t>While this solution provides a minor improvement over hard-coding parameters, co-packaging parameter values in a deploym</a:t>
             </a:r>
           </a:p>
         </p:txBody>
@@ -3487,8 +3487,8 @@
         </p:nvSpPr>
         <p:spPr>
           <a:xfrm>
-            <a:off x="274320" y="4320540"/>
-            <a:ext cx="201168" cy="201168"/>
+            <a:off x="365760" y="3749039"/>
+            <a:ext cx="274320" cy="274320"/>
           </a:xfrm>
           <a:prstGeom prst="ellipse">
             <a:avLst/>
@@ -3519,7 +3519,7 @@
           <a:lstStyle/>
           <a:p>
             <a:pPr algn="ctr">
-              <a:defRPr sz="700" b="1">
+              <a:defRPr sz="900" b="1">
                 <a:solidFill>
                   <a:srgbClr val="FFFFFF"/>
                 </a:solidFill>
@@ -3539,8 +3539,8 @@
         </p:nvSpPr>
         <p:spPr>
           <a:xfrm>
-            <a:off x="548640" y="4274820"/>
-            <a:ext cx="6400800" cy="736092"/>
+            <a:off x="777240" y="3749039"/>
+            <a:ext cx="5943600" cy="411480"/>
           </a:xfrm>
           <a:prstGeom prst="rect">
             <a:avLst/>
@@ -3548,13 +3548,13 @@
           <a:noFill/>
         </p:spPr>
         <p:txBody>
-          <a:bodyPr wrap="square" tIns="25400" bIns="0" lIns="0">
+          <a:bodyPr wrap="square">
             <a:spAutoFit/>
           </a:bodyPr>
           <a:lstStyle/>
           <a:p>
             <a:pPr>
-              <a:defRPr sz="800">
+              <a:defRPr sz="1000">
                 <a:solidFill>
                   <a:srgbClr val="CCCCCC"/>
                 </a:solidFill>
@@ -3562,7 +3562,7 @@
               </a:defRPr>
             </a:pPr>
             <a:r>
-              <a:t>Parameter Store allows for easy externalization of parameters, such as an API key. The secure string</a:t>
+              <a:t>Parameter Store allows for easy externalization of parameters, such as an API key. The secure string option provides for</a:t>
             </a:r>
           </a:p>
         </p:txBody>
@@ -3844,8 +3844,8 @@
         </p:blipFill>
         <p:spPr>
           <a:xfrm>
-            <a:off x="182880" y="1140089"/>
-            <a:ext cx="5303520" cy="3389100"/>
+            <a:off x="182880" y="1658075"/>
+            <a:ext cx="5303520" cy="2353128"/>
           </a:xfrm>
           <a:prstGeom prst="rect">
             <a:avLst/>
@@ -3980,9 +3980,9 @@
           <a:p>
             <a:pPr>
               <a:spcAft>
-                <a:spcPts val="400"/>
+                <a:spcPts val="600"/>
               </a:spcAft>
-              <a:defRPr sz="800">
+              <a:defRPr sz="900">
                 <a:solidFill>
                   <a:srgbClr val="212121"/>
                 </a:solidFill>
@@ -3990,15 +3990,15 @@
               </a:defRPr>
             </a:pPr>
             <a:r>
-              <a:t>• Hard-coding parameters within any code is not a good practice</a:t>
+              <a:t>• Hard-coding parameters within any code is not a good practice.</a:t>
             </a:r>
           </a:p>
           <a:p>
             <a:pPr>
               <a:spcAft>
-                <a:spcPts val="400"/>
+                <a:spcPts val="600"/>
               </a:spcAft>
-              <a:defRPr sz="800">
+              <a:defRPr sz="900">
                 <a:solidFill>
                   <a:srgbClr val="212121"/>
                 </a:solidFill>
@@ -4006,15 +4006,15 @@
               </a:defRPr>
             </a:pPr>
             <a:r>
-              <a:t>• Lambda function artifacts are not stored with encryption at rest</a:t>
+              <a:t>• Lambda function artifacts are not stored with encryption at rest.</a:t>
             </a:r>
           </a:p>
           <a:p>
             <a:pPr>
               <a:spcAft>
-                <a:spcPts val="400"/>
+                <a:spcPts val="600"/>
               </a:spcAft>
-              <a:defRPr sz="800">
+              <a:defRPr sz="900">
                 <a:solidFill>
                   <a:srgbClr val="212121"/>
                 </a:solidFill>
@@ -4022,15 +4022,15 @@
               </a:defRPr>
             </a:pPr>
             <a:r>
-              <a:t>• While the Java code is compiled and not visible from the Lambda console</a:t>
+              <a:t>• While the Java code is compiled and not visible from the Lambda console, the source code is not compiled and still carries the values without encryption.</a:t>
             </a:r>
           </a:p>
           <a:p>
             <a:pPr>
               <a:spcAft>
-                <a:spcPts val="400"/>
+                <a:spcPts val="600"/>
               </a:spcAft>
-              <a:defRPr sz="800">
+              <a:defRPr sz="900">
                 <a:solidFill>
                   <a:srgbClr val="212121"/>
                 </a:solidFill>
@@ -4038,39 +4038,7 @@
               </a:defRPr>
             </a:pPr>
             <a:r>
-              <a:t>• The source code is not compiled and still carries the values without encryption</a:t>
-            </a:r>
-          </a:p>
-          <a:p>
-            <a:pPr>
-              <a:spcAft>
-                <a:spcPts val="400"/>
-              </a:spcAft>
-              <a:defRPr sz="800">
-                <a:solidFill>
-                  <a:srgbClr val="212121"/>
-                </a:solidFill>
-                <a:latin typeface="Segoe UI"/>
-              </a:defRPr>
-            </a:pPr>
-            <a:r>
-              <a:t>• Any changes to parameter values would require code modification, rebuilding, and re-deployment</a:t>
-            </a:r>
-          </a:p>
-          <a:p>
-            <a:pPr>
-              <a:spcAft>
-                <a:spcPts val="400"/>
-              </a:spcAft>
-              <a:defRPr sz="800">
-                <a:solidFill>
-                  <a:srgbClr val="212121"/>
-                </a:solidFill>
-                <a:latin typeface="Segoe UI"/>
-              </a:defRPr>
-            </a:pPr>
-            <a:r>
-              <a:t>• Would not be operationally efficient</a:t>
+              <a:t>• Any changes to parameter values would require code modification, rebuilding, and re-deployment, which would not be operationally efficient.</a:t>
             </a:r>
           </a:p>
         </p:txBody>
@@ -4249,8 +4217,8 @@
         </p:blipFill>
         <p:spPr>
           <a:xfrm>
-            <a:off x="182880" y="1303771"/>
-            <a:ext cx="5303520" cy="3061736"/>
+            <a:off x="182880" y="914400"/>
+            <a:ext cx="3974870" cy="3840480"/>
           </a:xfrm>
           <a:prstGeom prst="rect">
             <a:avLst/>
@@ -4385,9 +4353,9 @@
           <a:p>
             <a:pPr>
               <a:spcAft>
-                <a:spcPts val="400"/>
+                <a:spcPts val="600"/>
               </a:spcAft>
-              <a:defRPr sz="800">
+              <a:defRPr sz="900">
                 <a:solidFill>
                   <a:srgbClr val="212121"/>
                 </a:solidFill>
@@ -4395,7 +4363,7 @@
               </a:defRPr>
             </a:pPr>
             <a:r>
-              <a:t>• Amazon EBS volumes can be mounted by Amazon EC2 instances, but not by Lambda functions</a:t>
+              <a:t>• Amazon EBS volumes can be mounted by Amazon EC2 instances, but not by Lambda functions.</a:t>
             </a:r>
           </a:p>
         </p:txBody>
@@ -4574,8 +4542,8 @@
         </p:blipFill>
         <p:spPr>
           <a:xfrm>
-            <a:off x="182880" y="1204267"/>
-            <a:ext cx="5303520" cy="3260745"/>
+            <a:off x="182880" y="1651060"/>
+            <a:ext cx="5303520" cy="2367158"/>
           </a:xfrm>
           <a:prstGeom prst="rect">
             <a:avLst/>
@@ -4710,9 +4678,9 @@
           <a:p>
             <a:pPr>
               <a:spcAft>
-                <a:spcPts val="400"/>
+                <a:spcPts val="600"/>
               </a:spcAft>
-              <a:defRPr sz="800">
+              <a:defRPr sz="900">
                 <a:solidFill>
                   <a:srgbClr val="212121"/>
                 </a:solidFill>
@@ -4720,15 +4688,15 @@
               </a:defRPr>
             </a:pPr>
             <a:r>
-              <a:t>• While this solution provides a minor improvement over hard-coding parameters</a:t>
+              <a:t>• While this solution provides a minor improvement over hard-coding parameters, co-packaging parameter values in a deployment artifact is not a Lambda function best practice.</a:t>
             </a:r>
           </a:p>
           <a:p>
             <a:pPr>
               <a:spcAft>
-                <a:spcPts val="400"/>
+                <a:spcPts val="600"/>
               </a:spcAft>
-              <a:defRPr sz="800">
+              <a:defRPr sz="900">
                 <a:solidFill>
                   <a:srgbClr val="212121"/>
                 </a:solidFill>
@@ -4736,15 +4704,15 @@
               </a:defRPr>
             </a:pPr>
             <a:r>
-              <a:t>• Co-packaging parameter values in a deployment artifact is not a Lambda function best practice</a:t>
+              <a:t>• Lambda function artifacts are not stored with encryption at rest.</a:t>
             </a:r>
           </a:p>
           <a:p>
             <a:pPr>
               <a:spcAft>
-                <a:spcPts val="400"/>
+                <a:spcPts val="600"/>
               </a:spcAft>
-              <a:defRPr sz="800">
+              <a:defRPr sz="900">
                 <a:solidFill>
                   <a:srgbClr val="212121"/>
                 </a:solidFill>
@@ -4752,15 +4720,15 @@
               </a:defRPr>
             </a:pPr>
             <a:r>
-              <a:t>• Lambda function artifacts are not stored with encryption at rest</a:t>
+              <a:t>• While the Java artifact, including the property file, is compiled and not visible in the Lambda console, the source code is not compiled and still carries the values without encryption.</a:t>
             </a:r>
           </a:p>
           <a:p>
             <a:pPr>
               <a:spcAft>
-                <a:spcPts val="400"/>
+                <a:spcPts val="600"/>
               </a:spcAft>
-              <a:defRPr sz="800">
+              <a:defRPr sz="900">
                 <a:solidFill>
                   <a:srgbClr val="212121"/>
                 </a:solidFill>
@@ -4768,71 +4736,7 @@
               </a:defRPr>
             </a:pPr>
             <a:r>
-              <a:t>• While the Java artifact</a:t>
-            </a:r>
-          </a:p>
-          <a:p>
-            <a:pPr>
-              <a:spcAft>
-                <a:spcPts val="400"/>
-              </a:spcAft>
-              <a:defRPr sz="800">
-                <a:solidFill>
-                  <a:srgbClr val="212121"/>
-                </a:solidFill>
-                <a:latin typeface="Segoe UI"/>
-              </a:defRPr>
-            </a:pPr>
-            <a:r>
-              <a:t>• Including the property file</a:t>
-            </a:r>
-          </a:p>
-          <a:p>
-            <a:pPr>
-              <a:spcAft>
-                <a:spcPts val="400"/>
-              </a:spcAft>
-              <a:defRPr sz="800">
-                <a:solidFill>
-                  <a:srgbClr val="212121"/>
-                </a:solidFill>
-                <a:latin typeface="Segoe UI"/>
-              </a:defRPr>
-            </a:pPr>
-            <a:r>
-              <a:t>• Is compiled and not visible in the Lambda console, the source code is not compiled and still carries the values without encryption</a:t>
-            </a:r>
-          </a:p>
-          <a:p>
-            <a:pPr>
-              <a:spcAft>
-                <a:spcPts val="400"/>
-              </a:spcAft>
-              <a:defRPr sz="800">
-                <a:solidFill>
-                  <a:srgbClr val="212121"/>
-                </a:solidFill>
-                <a:latin typeface="Segoe UI"/>
-              </a:defRPr>
-            </a:pPr>
-            <a:r>
-              <a:t>• Any changes to parameter values would require property file modification, rebuilding, and re-deployment</a:t>
-            </a:r>
-          </a:p>
-          <a:p>
-            <a:pPr>
-              <a:spcAft>
-                <a:spcPts val="400"/>
-              </a:spcAft>
-              <a:defRPr sz="800">
-                <a:solidFill>
-                  <a:srgbClr val="212121"/>
-                </a:solidFill>
-                <a:latin typeface="Segoe UI"/>
-              </a:defRPr>
-            </a:pPr>
-            <a:r>
-              <a:t>• Is not operationally efficient</a:t>
+              <a:t>• Any changes to parameter values would require property file modification, rebuilding, and re-deployment, which is not operationally efficient.</a:t>
             </a:r>
           </a:p>
         </p:txBody>
@@ -5011,8 +4915,8 @@
         </p:blipFill>
         <p:spPr>
           <a:xfrm>
-            <a:off x="182880" y="914400"/>
-            <a:ext cx="3698240" cy="3840480"/>
+            <a:off x="182880" y="1035395"/>
+            <a:ext cx="5303520" cy="3598488"/>
           </a:xfrm>
           <a:prstGeom prst="rect">
             <a:avLst/>
@@ -5147,9 +5051,9 @@
           <a:p>
             <a:pPr>
               <a:spcAft>
-                <a:spcPts val="400"/>
+                <a:spcPts val="600"/>
               </a:spcAft>
-              <a:defRPr sz="800">
+              <a:defRPr sz="900">
                 <a:solidFill>
                   <a:srgbClr val="212121"/>
                 </a:solidFill>
@@ -5157,15 +5061,15 @@
               </a:defRPr>
             </a:pPr>
             <a:r>
-              <a:t>• Parameter Store allows for easy externalization of parameters, such as an API key</a:t>
+              <a:t>• Parameter Store allows for easy externalization of parameters, such as an API key.</a:t>
             </a:r>
           </a:p>
           <a:p>
             <a:pPr>
               <a:spcAft>
-                <a:spcPts val="400"/>
+                <a:spcPts val="600"/>
               </a:spcAft>
-              <a:defRPr sz="800">
+              <a:defRPr sz="900">
                 <a:solidFill>
                   <a:srgbClr val="212121"/>
                 </a:solidFill>
@@ -5173,15 +5077,15 @@
               </a:defRPr>
             </a:pPr>
             <a:r>
-              <a:t>• The secure string option provides for data security by keeping the value encrypted at rest</a:t>
+              <a:t>• The secure string option provides for data security by keeping the value encrypted at rest.</a:t>
             </a:r>
           </a:p>
           <a:p>
             <a:pPr>
               <a:spcAft>
-                <a:spcPts val="400"/>
+                <a:spcPts val="600"/>
               </a:spcAft>
-              <a:defRPr sz="800">
+              <a:defRPr sz="900">
                 <a:solidFill>
                   <a:srgbClr val="212121"/>
                 </a:solidFill>
@@ -5189,15 +5093,15 @@
               </a:defRPr>
             </a:pPr>
             <a:r>
-              <a:t>• Authorized access to the parameter is governed by IAM permissions</a:t>
+              <a:t>• Authorized access to the parameter is governed by IAM permissions.</a:t>
             </a:r>
           </a:p>
           <a:p>
             <a:pPr>
               <a:spcAft>
-                <a:spcPts val="400"/>
+                <a:spcPts val="600"/>
               </a:spcAft>
-              <a:defRPr sz="800">
+              <a:defRPr sz="900">
                 <a:solidFill>
                   <a:srgbClr val="212121"/>
                 </a:solidFill>
@@ -5205,23 +5109,7 @@
               </a:defRPr>
             </a:pPr>
             <a:r>
-              <a:t>• Parameter values can be easily changed by authorized principals at any time without requiring a re-deployment of the function</a:t>
-            </a:r>
-          </a:p>
-          <a:p>
-            <a:pPr>
-              <a:spcAft>
-                <a:spcPts val="400"/>
-              </a:spcAft>
-              <a:defRPr sz="800">
-                <a:solidFill>
-                  <a:srgbClr val="212121"/>
-                </a:solidFill>
-                <a:latin typeface="Segoe UI"/>
-              </a:defRPr>
-            </a:pPr>
-            <a:r>
-              <a:t>• Although the function would require intelligence to re-read the parameter values</a:t>
+              <a:t>• Parameter values can be easily changed by authorized principals at any time without requiring a re-deployment of the function, although the function would require intelligence to re-read the parameter values.</a:t>
             </a:r>
           </a:p>
         </p:txBody>
